--- a/templates/BNI_テンプレート_ビジター紹介.pptx
+++ b/templates/BNI_テンプレート_ビジター紹介.pptx
@@ -10564,7 +10564,7 @@
                 <a:latin typeface="Meiryo UI" panose="020B0604030504040204" pitchFamily="50" charset="-128"/>
                 <a:ea typeface="Meiryo UI" panose="020B0604030504040204" pitchFamily="50" charset="-128"/>
               </a:rPr>
-              <a:t>瞳 ゆり</a:t>
+              <a:t>泉 ゆか</a:t>
             </a:r>
             <a:endParaRPr lang="en-US" altLang="ja-JP" sz="1600" dirty="0">
               <a:ln w="0"/>
@@ -10611,7 +10611,7 @@
                 <a:latin typeface="Meiryo UI" panose="020B0604030504040204" pitchFamily="50" charset="-128"/>
                 <a:ea typeface="Meiryo UI" panose="020B0604030504040204" pitchFamily="50" charset="-128"/>
               </a:rPr>
-              <a:t>伊東 克彦 様</a:t>
+              <a:t>伊原 克己 様</a:t>
             </a:r>
             <a:endParaRPr lang="ja-JP" altLang="en-US" sz="4400" b="1" cap="none" spc="0" dirty="0">
               <a:ln w="0"/>
@@ -10825,7 +10825,7 @@
                 <a:latin typeface="Meiryo UI" panose="020B0604030504040204" pitchFamily="50" charset="-128"/>
                 <a:ea typeface="Meiryo UI" panose="020B0604030504040204" pitchFamily="50" charset="-128"/>
               </a:rPr>
-              <a:t>内山 泰宏</a:t>
+              <a:t>内海 泰司</a:t>
             </a:r>
             <a:endParaRPr lang="en-US" altLang="ja-JP" sz="1600" dirty="0">
               <a:ln w="0"/>
@@ -10872,7 +10872,7 @@
                 <a:latin typeface="Meiryo UI" panose="020B0604030504040204" pitchFamily="50" charset="-128"/>
                 <a:ea typeface="Meiryo UI" panose="020B0604030504040204" pitchFamily="50" charset="-128"/>
               </a:rPr>
-              <a:t>岩城 一成 様</a:t>
+              <a:t>石黒 一真 様</a:t>
             </a:r>
             <a:endParaRPr lang="ja-JP" altLang="en-US" sz="4400" b="1" cap="none" spc="0" dirty="0">
               <a:ln w="0"/>
@@ -11086,7 +11086,7 @@
                 <a:latin typeface="Meiryo UI" panose="020B0604030504040204" pitchFamily="50" charset="-128"/>
                 <a:ea typeface="Meiryo UI" panose="020B0604030504040204" pitchFamily="50" charset="-128"/>
               </a:rPr>
-              <a:t>瞳 ゆり</a:t>
+              <a:t>泉 ゆか</a:t>
             </a:r>
             <a:endParaRPr lang="en-US" altLang="ja-JP" sz="1600" dirty="0">
               <a:ln w="0"/>
@@ -11133,7 +11133,7 @@
                 <a:latin typeface="Meiryo UI" panose="020B0604030504040204" pitchFamily="50" charset="-128"/>
                 <a:ea typeface="Meiryo UI" panose="020B0604030504040204" pitchFamily="50" charset="-128"/>
               </a:rPr>
-              <a:t>大平 和夫 様</a:t>
+              <a:t>大川 和也 様</a:t>
             </a:r>
             <a:endParaRPr lang="ja-JP" altLang="en-US" sz="4400" b="1" cap="none" spc="0" dirty="0">
               <a:ln w="0"/>
